--- a/faithslide/data/template.pptx
+++ b/faithslide/data/template.pptx
@@ -15,7 +15,6 @@
     <p:sldId id="979" r:id="rId6"/>
     <p:sldId id="3205" r:id="rId7"/>
     <p:sldId id="3275" r:id="rId8"/>
-    <p:sldId id="3266" r:id="rId9"/>
   </p:sldIdLst>
   <p:sldSz cx="12192000" cy="6858000"/>
   <p:notesSz cx="6858000" cy="9144000"/>
@@ -18324,113 +18323,6 @@
     <p:extLst>
       <p:ext uri="{BB962C8B-B14F-4D97-AF65-F5344CB8AC3E}">
         <p14:creationId xmlns:p14="http://schemas.microsoft.com/office/powerpoint/2010/main" val="2411149566"/>
-      </p:ext>
-    </p:extLst>
-  </p:cSld>
-  <p:clrMapOvr>
-    <a:masterClrMapping/>
-  </p:clrMapOvr>
-</p:sld>
-</file>
-
-<file path=ppt/slides/slide6.xml><?xml version="1.0" encoding="utf-8"?>
-<p:sld xmlns:a="http://schemas.openxmlformats.org/drawingml/2006/main" xmlns:r="http://schemas.openxmlformats.org/officeDocument/2006/relationships" xmlns:p="http://schemas.openxmlformats.org/presentationml/2006/main">
-  <p:cSld>
-    <p:spTree>
-      <p:nvGrpSpPr>
-        <p:cNvPr id="1" name="">
-          <a:extLst>
-            <a:ext uri="{FF2B5EF4-FFF2-40B4-BE49-F238E27FC236}">
-              <a16:creationId xmlns:a16="http://schemas.microsoft.com/office/drawing/2014/main" id="{D9E870A8-9D44-F8E1-1B1C-987038648C48}"/>
-            </a:ext>
-          </a:extLst>
-        </p:cNvPr>
-        <p:cNvGrpSpPr/>
-        <p:nvPr/>
-      </p:nvGrpSpPr>
-      <p:grpSpPr>
-        <a:xfrm>
-          <a:off x="0" y="0"/>
-          <a:ext cx="0" cy="0"/>
-          <a:chOff x="0" y="0"/>
-          <a:chExt cx="0" cy="0"/>
-        </a:xfrm>
-      </p:grpSpPr>
-      <p:sp>
-        <p:nvSpPr>
-          <p:cNvPr id="2" name="標題 1">
-            <a:extLst>
-              <a:ext uri="{FF2B5EF4-FFF2-40B4-BE49-F238E27FC236}">
-                <a16:creationId xmlns:a16="http://schemas.microsoft.com/office/drawing/2014/main" id="{910BCF18-74FE-EDED-EFCD-12C29802E62C}"/>
-              </a:ext>
-            </a:extLst>
-          </p:cNvPr>
-          <p:cNvSpPr>
-            <a:spLocks noGrp="1"/>
-          </p:cNvSpPr>
-          <p:nvPr>
-            <p:ph type="title"/>
-          </p:nvPr>
-        </p:nvSpPr>
-        <p:spPr/>
-        <p:txBody>
-          <a:bodyPr/>
-          <a:lstStyle/>
-          <a:p>
-            <a:r>
-              <a:rPr lang="zh-TW" altLang="zh-TW" dirty="0"/>
-              <a:t>以弗所書二章</a:t>
-            </a:r>
-            <a:r>
-              <a:rPr lang="en-US" altLang="zh-TW" dirty="0"/>
-              <a:t>1-3</a:t>
-            </a:r>
-            <a:r>
-              <a:rPr lang="zh-TW" altLang="zh-TW" dirty="0"/>
-              <a:t>節</a:t>
-            </a:r>
-            <a:endParaRPr lang="zh-TW" altLang="en-US" dirty="0"/>
-          </a:p>
-        </p:txBody>
-      </p:sp>
-      <p:sp>
-        <p:nvSpPr>
-          <p:cNvPr id="3" name="內容版面配置區 2">
-            <a:extLst>
-              <a:ext uri="{FF2B5EF4-FFF2-40B4-BE49-F238E27FC236}">
-                <a16:creationId xmlns:a16="http://schemas.microsoft.com/office/drawing/2014/main" id="{11AD545B-D8C2-8589-43A3-DE3C6CE675FA}"/>
-              </a:ext>
-            </a:extLst>
-          </p:cNvPr>
-          <p:cNvSpPr>
-            <a:spLocks noGrp="1"/>
-          </p:cNvSpPr>
-          <p:nvPr>
-            <p:ph idx="1"/>
-          </p:nvPr>
-        </p:nvSpPr>
-        <p:spPr/>
-        <p:txBody>
-          <a:bodyPr/>
-          <a:lstStyle/>
-          <a:p>
-            <a:pPr marL="722313" indent="-722313"/>
-            <a:r>
-              <a:rPr lang="en-US" altLang="zh-TW" sz="6600" dirty="0"/>
-              <a:t>1.</a:t>
-            </a:r>
-            <a:r>
-              <a:rPr lang="zh-TW" altLang="en-US" dirty="0"/>
-              <a:t>你們死在過犯罪惡之中，他叫你們活過來。</a:t>
-            </a:r>
-            <a:endParaRPr lang="zh-TW" altLang="en-US" sz="6600" dirty="0"/>
-          </a:p>
-        </p:txBody>
-      </p:sp>
-    </p:spTree>
-    <p:extLst>
-      <p:ext uri="{BB962C8B-B14F-4D97-AF65-F5344CB8AC3E}">
-        <p14:creationId xmlns:p14="http://schemas.microsoft.com/office/powerpoint/2010/main" val="2499246759"/>
       </p:ext>
     </p:extLst>
   </p:cSld>
